--- a/submission/ENG612_Project2_Presentation.pptx
+++ b/submission/ENG612_Project2_Presentation.pptx
@@ -2549,7 +2549,7 @@
           </a:prstGeom>
           <a:extLst>
             <a:ext uri="{C572A759-6A51-4108-AA02-DFA0A04FC94B}">
-              <ma14:wrappingTextBoxFlag xmlns:ma14="http://schemas.microsoft.com/office/mac/drawingml/2011/main" xmlns="" val="0"/>
+              <ma14:wrappingTextBoxFlag xmlns="" xmlns:ma14="http://schemas.microsoft.com/office/mac/drawingml/2011/main" val="0"/>
             </a:ext>
           </a:extLst>
         </p:spPr>
@@ -2660,7 +2660,7 @@
           </a:prstGeom>
           <a:extLst>
             <a:ext uri="{C572A759-6A51-4108-AA02-DFA0A04FC94B}">
-              <ma14:wrappingTextBoxFlag xmlns:ma14="http://schemas.microsoft.com/office/mac/drawingml/2011/main" xmlns="" val="0"/>
+              <ma14:wrappingTextBoxFlag xmlns="" xmlns:ma14="http://schemas.microsoft.com/office/mac/drawingml/2011/main" val="0"/>
             </a:ext>
           </a:extLst>
         </p:spPr>
@@ -3156,38 +3156,34 @@
           <a:bodyPr wrap="square" lIns="0" tIns="0" rIns="0" bIns="0" rtlCol="0" anchor="ctr"/>
           <a:lstStyle/>
           <a:p>
-            <a:pPr marL="0" indent="0">
-              <a:buNone/>
-            </a:pPr>
             <a:r>
-              <a:rPr lang="en-US" sz="1400" dirty="0">
+              <a:rPr lang="en-AU" sz="1400" dirty="0">
                 <a:solidFill>
-                  <a:srgbClr val="C9D6E0"/>
+                  <a:schemeClr val="bg1"/>
                 </a:solidFill>
-                <a:latin typeface="Calibri" pitchFamily="34" charset="0"/>
-                <a:ea typeface="Calibri" pitchFamily="34" charset="-122"/>
-                <a:cs typeface="Calibri" pitchFamily="34" charset="-120"/>
               </a:rPr>
-              <a:t>[Student name 1] ([student number])   [Student name 2] ([student number])</a:t>
+              <a:t>Kazi Ragib Yeahsar (35502987)</a:t>
             </a:r>
-            <a:endParaRPr lang="en-US" sz="1400" dirty="0"/>
-          </a:p>
-          <a:p>
-            <a:pPr marL="0" indent="0">
-              <a:buNone/>
-            </a:pPr>
+            <a:br>
+              <a:rPr lang="en-AU" sz="1400" dirty="0">
+                <a:solidFill>
+                  <a:schemeClr val="bg1"/>
+                </a:solidFill>
+              </a:rPr>
+            </a:br>
             <a:r>
-              <a:rPr lang="en-US" sz="1400" dirty="0">
+              <a:rPr lang="en-AU" sz="1400" dirty="0">
                 <a:solidFill>
-                  <a:srgbClr val="C9D6E0"/>
+                  <a:schemeClr val="bg1"/>
                 </a:solidFill>
-                <a:latin typeface="Calibri" pitchFamily="34" charset="0"/>
-                <a:ea typeface="Calibri" pitchFamily="34" charset="-122"/>
-                <a:cs typeface="Calibri" pitchFamily="34" charset="-120"/>
               </a:rPr>
-              <a:t>[Unit code]   [Tutor / lab session]</a:t>
+              <a:t>Mir Tahir Tahsin Ahmad (35624701)</a:t>
             </a:r>
-            <a:endParaRPr lang="en-US" sz="1400" dirty="0"/>
+            <a:endParaRPr lang="en-US" sz="1400" dirty="0">
+              <a:solidFill>
+                <a:schemeClr val="bg1"/>
+              </a:solidFill>
+            </a:endParaRPr>
           </a:p>
         </p:txBody>
       </p:sp>
@@ -3398,7 +3394,7 @@
           </a:prstGeom>
           <a:extLst>
             <a:ext uri="{C572A759-6A51-4108-AA02-DFA0A04FC94B}">
-              <ma14:wrappingTextBoxFlag xmlns:ma14="http://schemas.microsoft.com/office/mac/drawingml/2011/main" xmlns="" val="0"/>
+              <ma14:wrappingTextBoxFlag xmlns="" xmlns:ma14="http://schemas.microsoft.com/office/mac/drawingml/2011/main" val="0"/>
             </a:ext>
           </a:extLst>
         </p:spPr>
@@ -4073,7 +4069,7 @@
           </a:prstGeom>
           <a:extLst>
             <a:ext uri="{C572A759-6A51-4108-AA02-DFA0A04FC94B}">
-              <ma14:wrappingTextBoxFlag xmlns:ma14="http://schemas.microsoft.com/office/mac/drawingml/2011/main" xmlns="" val="0"/>
+              <ma14:wrappingTextBoxFlag xmlns="" xmlns:ma14="http://schemas.microsoft.com/office/mac/drawingml/2011/main" val="0"/>
             </a:ext>
           </a:extLst>
         </p:spPr>
@@ -4942,7 +4938,7 @@
           </a:prstGeom>
           <a:extLst>
             <a:ext uri="{C572A759-6A51-4108-AA02-DFA0A04FC94B}">
-              <ma14:wrappingTextBoxFlag xmlns:ma14="http://schemas.microsoft.com/office/mac/drawingml/2011/main" xmlns="" val="0"/>
+              <ma14:wrappingTextBoxFlag xmlns="" xmlns:ma14="http://schemas.microsoft.com/office/mac/drawingml/2011/main" val="0"/>
             </a:ext>
           </a:extLst>
         </p:spPr>
@@ -5457,7 +5453,7 @@
           </a:prstGeom>
           <a:extLst>
             <a:ext uri="{C572A759-6A51-4108-AA02-DFA0A04FC94B}">
-              <ma14:wrappingTextBoxFlag xmlns:ma14="http://schemas.microsoft.com/office/mac/drawingml/2011/main" xmlns="" val="0"/>
+              <ma14:wrappingTextBoxFlag xmlns="" xmlns:ma14="http://schemas.microsoft.com/office/mac/drawingml/2011/main" val="0"/>
             </a:ext>
           </a:extLst>
         </p:spPr>
@@ -5903,7 +5899,7 @@
           </a:prstGeom>
           <a:extLst>
             <a:ext uri="{C572A759-6A51-4108-AA02-DFA0A04FC94B}">
-              <ma14:wrappingTextBoxFlag xmlns:ma14="http://schemas.microsoft.com/office/mac/drawingml/2011/main" xmlns="" val="0"/>
+              <ma14:wrappingTextBoxFlag xmlns="" xmlns:ma14="http://schemas.microsoft.com/office/mac/drawingml/2011/main" val="0"/>
             </a:ext>
           </a:extLst>
         </p:spPr>
@@ -6472,7 +6468,7 @@
           </a:prstGeom>
           <a:extLst>
             <a:ext uri="{C572A759-6A51-4108-AA02-DFA0A04FC94B}">
-              <ma14:wrappingTextBoxFlag xmlns:ma14="http://schemas.microsoft.com/office/mac/drawingml/2011/main" xmlns="" val="0"/>
+              <ma14:wrappingTextBoxFlag xmlns="" xmlns:ma14="http://schemas.microsoft.com/office/mac/drawingml/2011/main" val="0"/>
             </a:ext>
           </a:extLst>
         </p:spPr>
@@ -7146,7 +7142,7 @@
           </a:prstGeom>
           <a:extLst>
             <a:ext uri="{C572A759-6A51-4108-AA02-DFA0A04FC94B}">
-              <ma14:wrappingTextBoxFlag xmlns:ma14="http://schemas.microsoft.com/office/mac/drawingml/2011/main" xmlns="" val="0"/>
+              <ma14:wrappingTextBoxFlag xmlns="" xmlns:ma14="http://schemas.microsoft.com/office/mac/drawingml/2011/main" val="0"/>
             </a:ext>
           </a:extLst>
         </p:spPr>
@@ -8922,7 +8918,7 @@
           </a:prstGeom>
           <a:extLst>
             <a:ext uri="{C572A759-6A51-4108-AA02-DFA0A04FC94B}">
-              <ma14:wrappingTextBoxFlag xmlns:ma14="http://schemas.microsoft.com/office/mac/drawingml/2011/main" xmlns="" val="0"/>
+              <ma14:wrappingTextBoxFlag xmlns="" xmlns:ma14="http://schemas.microsoft.com/office/mac/drawingml/2011/main" val="0"/>
             </a:ext>
           </a:extLst>
         </p:spPr>
@@ -9414,7 +9410,7 @@
           </a:prstGeom>
           <a:extLst>
             <a:ext uri="{C572A759-6A51-4108-AA02-DFA0A04FC94B}">
-              <ma14:wrappingTextBoxFlag xmlns:ma14="http://schemas.microsoft.com/office/mac/drawingml/2011/main" xmlns="" val="0"/>
+              <ma14:wrappingTextBoxFlag xmlns="" xmlns:ma14="http://schemas.microsoft.com/office/mac/drawingml/2011/main" val="0"/>
             </a:ext>
           </a:extLst>
         </p:spPr>
@@ -10198,7 +10194,7 @@
           </a:prstGeom>
           <a:extLst>
             <a:ext uri="{C572A759-6A51-4108-AA02-DFA0A04FC94B}">
-              <ma14:wrappingTextBoxFlag xmlns:ma14="http://schemas.microsoft.com/office/mac/drawingml/2011/main" xmlns="" val="0"/>
+              <ma14:wrappingTextBoxFlag xmlns="" xmlns:ma14="http://schemas.microsoft.com/office/mac/drawingml/2011/main" val="0"/>
             </a:ext>
           </a:extLst>
         </p:spPr>
@@ -10792,7 +10788,7 @@
           </a:prstGeom>
           <a:extLst>
             <a:ext uri="{C572A759-6A51-4108-AA02-DFA0A04FC94B}">
-              <ma14:wrappingTextBoxFlag xmlns:ma14="http://schemas.microsoft.com/office/mac/drawingml/2011/main" xmlns="" val="0"/>
+              <ma14:wrappingTextBoxFlag xmlns="" xmlns:ma14="http://schemas.microsoft.com/office/mac/drawingml/2011/main" val="0"/>
             </a:ext>
           </a:extLst>
         </p:spPr>
@@ -11703,7 +11699,7 @@
           </a:prstGeom>
           <a:extLst>
             <a:ext uri="{C572A759-6A51-4108-AA02-DFA0A04FC94B}">
-              <ma14:wrappingTextBoxFlag xmlns:ma14="http://schemas.microsoft.com/office/mac/drawingml/2011/main" xmlns="" val="0"/>
+              <ma14:wrappingTextBoxFlag xmlns="" xmlns:ma14="http://schemas.microsoft.com/office/mac/drawingml/2011/main" val="0"/>
             </a:ext>
           </a:extLst>
         </p:spPr>
@@ -13185,7 +13181,7 @@
           </a:prstGeom>
           <a:extLst>
             <a:ext uri="{C572A759-6A51-4108-AA02-DFA0A04FC94B}">
-              <ma14:wrappingTextBoxFlag xmlns:ma14="http://schemas.microsoft.com/office/mac/drawingml/2011/main" xmlns="" val="0"/>
+              <ma14:wrappingTextBoxFlag xmlns="" xmlns:ma14="http://schemas.microsoft.com/office/mac/drawingml/2011/main" val="0"/>
             </a:ext>
           </a:extLst>
         </p:spPr>
@@ -15505,7 +15501,7 @@
           </a:prstGeom>
           <a:extLst>
             <a:ext uri="{C572A759-6A51-4108-AA02-DFA0A04FC94B}">
-              <ma14:wrappingTextBoxFlag xmlns:ma14="http://schemas.microsoft.com/office/mac/drawingml/2011/main" xmlns="" val="0"/>
+              <ma14:wrappingTextBoxFlag xmlns="" xmlns:ma14="http://schemas.microsoft.com/office/mac/drawingml/2011/main" val="0"/>
             </a:ext>
           </a:extLst>
         </p:spPr>
@@ -16152,6 +16148,15 @@
 </file>
 
 <file path=customXml/item1.xml><?xml version="1.0" encoding="utf-8"?>
+<?mso-contentType ?>
+<FormTemplates xmlns="http://schemas.microsoft.com/sharepoint/v3/contenttype/forms">
+  <Display>DocumentLibraryForm</Display>
+  <Edit>DocumentLibraryForm</Edit>
+  <New>DocumentLibraryForm</New>
+</FormTemplates>
+</file>
+
+<file path=customXml/item2.xml><?xml version="1.0" encoding="utf-8"?>
 <ct:contentTypeSchema xmlns:ct="http://schemas.microsoft.com/office/2006/metadata/contentType" xmlns:ma="http://schemas.microsoft.com/office/2006/metadata/properties/metaAttributes" ct:_="" ma:_="" ma:contentTypeName="Document" ma:contentTypeID="0x0101005D7DFA110F09F046A7C859084FCBF808" ma:contentTypeVersion="9" ma:contentTypeDescription="Create a new document." ma:contentTypeScope="" ma:versionID="a96b54b397c795b3c6a26f8a75638bb4">
   <xsd:schema xmlns:xsd="http://www.w3.org/2001/XMLSchema" xmlns:xs="http://www.w3.org/2001/XMLSchema" xmlns:p="http://schemas.microsoft.com/office/2006/metadata/properties" xmlns:ns3="0da6376b-e9ea-432a-b40f-2e0a82d2292f" targetNamespace="http://schemas.microsoft.com/office/2006/metadata/properties" ma:root="true" ma:fieldsID="960ef563fd4971b811c7e7063a95c07d" ns3:_="">
     <xsd:import namespace="0da6376b-e9ea-432a-b40f-2e0a82d2292f"/>
@@ -16327,15 +16332,6 @@
 </ct:contentTypeSchema>
 </file>
 
-<file path=customXml/item2.xml><?xml version="1.0" encoding="utf-8"?>
-<?mso-contentType ?>
-<FormTemplates xmlns="http://schemas.microsoft.com/sharepoint/v3/contenttype/forms">
-  <Display>DocumentLibraryForm</Display>
-  <Edit>DocumentLibraryForm</Edit>
-  <New>DocumentLibraryForm</New>
-</FormTemplates>
-</file>
-
 <file path=customXml/item3.xml><?xml version="1.0" encoding="utf-8"?>
 <p:properties xmlns:p="http://schemas.microsoft.com/office/2006/metadata/properties" xmlns:xsi="http://www.w3.org/2001/XMLSchema-instance" xmlns:pc="http://schemas.microsoft.com/office/infopath/2007/PartnerControls">
   <documentManagement>
@@ -16345,6 +16341,14 @@
 </file>
 
 <file path=customXml/itemProps1.xml><?xml version="1.0" encoding="utf-8"?>
+<ds:datastoreItem xmlns:ds="http://schemas.openxmlformats.org/officeDocument/2006/customXml" ds:itemID="{641C0C3C-4C1F-4AA1-BE43-54B392B51463}">
+  <ds:schemaRefs>
+    <ds:schemaRef ds:uri="http://schemas.microsoft.com/sharepoint/v3/contenttype/forms"/>
+  </ds:schemaRefs>
+</ds:datastoreItem>
+</file>
+
+<file path=customXml/itemProps2.xml><?xml version="1.0" encoding="utf-8"?>
 <ds:datastoreItem xmlns:ds="http://schemas.openxmlformats.org/officeDocument/2006/customXml" ds:itemID="{697AAF9E-53F0-4EB2-B8D5-CEA31BAA0570}">
   <ds:schemaRefs>
     <ds:schemaRef ds:uri="http://schemas.microsoft.com/office/2006/metadata/contentType"/>
@@ -16358,14 +16362,6 @@
     <ds:schemaRef ds:uri="http://purl.org/dc/elements/1.1/"/>
     <ds:schemaRef ds:uri="http://purl.org/dc/terms/"/>
     <ds:schemaRef ds:uri="http://schemas.microsoft.com/internal/obd"/>
-  </ds:schemaRefs>
-</ds:datastoreItem>
-</file>
-
-<file path=customXml/itemProps2.xml><?xml version="1.0" encoding="utf-8"?>
-<ds:datastoreItem xmlns:ds="http://schemas.openxmlformats.org/officeDocument/2006/customXml" ds:itemID="{641C0C3C-4C1F-4AA1-BE43-54B392B51463}">
-  <ds:schemaRefs>
-    <ds:schemaRef ds:uri="http://schemas.microsoft.com/sharepoint/v3/contenttype/forms"/>
   </ds:schemaRefs>
 </ds:datastoreItem>
 </file>
